--- a/dist/초6/영어/의사소통/초6_영어_의사소통_03_세계문화존중.pptx
+++ b/dist/초6/영어/의사소통/초6_영어_의사소통_03_세계문화존중.pptx
@@ -121,13 +121,13 @@
   <p:extLst>
     <p:ext uri="{521415D9-36F7-43E2-AB2F-B90AF26B5E84}">
       <p14:sectionLst xmlns:p14="http://schemas.microsoft.com/office/powerpoint/2010/main">
-        <p14:section name="도입" id="{a38fbf75-fb4f-024a-3b6f-b8fbb17c04bf}">
+        <p14:section name="도입" id="{6abff2ad-fc28-2d9d-5ba7-2201f667cf4f}">
           <p14:sldIdLst>
             <p14:sldId id="256"/>
             <p14:sldId id="257"/>
           </p14:sldIdLst>
         </p14:section>
-        <p14:section name="개념" id="{0b682a2d-76f1-44b3-29ec-405e85c83c87}">
+        <p14:section name="개념" id="{461e7299-beca-75d3-5c25-08284ec36c5f}">
           <p14:sldIdLst>
             <p14:sldId id="258"/>
             <p14:sldId id="259"/>
@@ -135,7 +135,7 @@
             <p14:sldId id="261"/>
           </p14:sldIdLst>
         </p14:section>
-        <p14:section name="연습" id="{0a2de49b-c3c7-eaa4-c7ee-3d7afe8fa0c7}">
+        <p14:section name="연습" id="{b0595b7a-0aa5-780f-999e-92b328007c1a}">
           <p14:sldIdLst>
             <p14:sldId id="262"/>
             <p14:sldId id="263"/>
@@ -143,19 +143,19 @@
             <p14:sldId id="265"/>
           </p14:sldIdLst>
         </p14:section>
-        <p14:section name="확인" id="{39f04738-bf7e-3bcf-1812-19af148bb728}">
+        <p14:section name="확인" id="{71ecd66d-aef4-58f5-43f4-c1e14327919b}">
           <p14:sldIdLst>
             <p14:sldId id="266"/>
             <p14:sldId id="267"/>
             <p14:sldId id="268"/>
           </p14:sldIdLst>
         </p14:section>
-        <p14:section name="정리" id="{3181626e-76c9-8720-e40e-acd3a99f2b4d}">
+        <p14:section name="정리" id="{662fd18d-fe0a-d46d-ed08-a08ac36effdb}">
           <p14:sldIdLst>
             <p14:sldId id="269"/>
           </p14:sldIdLst>
         </p14:section>
-        <p14:section name="보충" id="{b6cbdf2d-5fd3-e052-91a8-857c9f7b1c30}">
+        <p14:section name="보충" id="{75d51c80-6e1f-3ec7-e745-c3de54d884f3}">
           <p14:sldIdLst>
             <p14:sldId id="270"/>
           </p14:sldIdLst>
